--- a/doc-mk/ppt/vllm-dp1-candidate-structure-detail.pptx
+++ b/doc-mk/ppt/vllm-dp1-candidate-structure-detail.pptx
@@ -1215,7 +1215,7 @@
           <a:p>
             <a:r>
               <a:rPr lang="en-US" dirty="0"/>
-              <a:t>⚠ 표시한 ObjectFeature 세 필드가 C2 비용의 본질 — 관측 불가 지표 100%.</a:t>
+              <a:t>⚠ 표시한 ObjectFeature 세 필드가 C2 비용의 본질. 비용 함수의 형태 자체에서 '구분 능력이 미래 정보에 묶여 있다'가 나온다.</a:t>
             </a:r>
             <a:endParaRPr lang="en-US" dirty="0"/>
           </a:p>
@@ -2438,7 +2438,7 @@
                 <a:gridCol w="3200400"/>
                 <a:gridCol w="3200400"/>
               </a:tblGrid>
-              <a:tr h="365760">
+              <a:tr h="329184">
                 <a:tc>
                   <a:txBody>
                     <a:bodyPr/>
@@ -2712,7 +2712,7 @@
                   </a:tcPr>
                 </a:tc>
               </a:tr>
-              <a:tr h="402336">
+              <a:tr h="329184">
                 <a:tc>
                   <a:txBody>
                     <a:bodyPr/>
@@ -2974,7 +2974,793 @@
                   </a:tcPr>
                 </a:tc>
               </a:tr>
-              <a:tr h="402336">
+              <a:tr h="329184">
+                <a:tc>
+                  <a:txBody>
+                    <a:bodyPr/>
+                    <a:lstStyle/>
+                    <a:p>
+                      <a:pPr indent="0" marL="0">
+                        <a:buNone/>
+                      </a:pPr>
+                      <a:r>
+                        <a:rPr lang="en-US" sz="950" b="1" dirty="0">
+                          <a:solidFill>
+                            <a:srgbClr val="1F2933"/>
+                          </a:solidFill>
+                          <a:latin typeface="Arial" pitchFamily="34" charset="0"/>
+                          <a:ea typeface="Arial" pitchFamily="34" charset="-122"/>
+                          <a:cs typeface="Arial" pitchFamily="34" charset="-120"/>
+                        </a:rPr>
+                        <a:t>[실측] dispatch 메시지 수</a:t>
+                      </a:r>
+                      <a:endParaRPr lang="en-US" sz="950" dirty="0">
+                        <a:latin typeface="Arial" charset="0"/>
+                        <a:ea typeface="Arial" charset="0"/>
+                        <a:cs typeface="Arial" charset="0"/>
+                      </a:endParaRPr>
+                    </a:p>
+                  </a:txBody>
+                  <a:tcPr marL="101600" marR="101600" marT="50800" marB="50800" anchor="ctr">
+                    <a:lnL w="9525" cap="flat" cmpd="sng" algn="ctr">
+                      <a:solidFill>
+                        <a:srgbClr val="DCE1E7"/>
+                      </a:solidFill>
+                      <a:prstDash val="solid"/>
+                      <a:round/>
+                      <a:headEnd type="none" w="med" len="med"/>
+                      <a:tailEnd type="none" w="med" len="med"/>
+                    </a:lnL>
+                    <a:lnR w="9525" cap="flat" cmpd="sng" algn="ctr">
+                      <a:solidFill>
+                        <a:srgbClr val="DCE1E7"/>
+                      </a:solidFill>
+                      <a:prstDash val="solid"/>
+                      <a:round/>
+                      <a:headEnd type="none" w="med" len="med"/>
+                      <a:tailEnd type="none" w="med" len="med"/>
+                    </a:lnR>
+                    <a:lnT w="9525" cap="flat" cmpd="sng" algn="ctr">
+                      <a:solidFill>
+                        <a:srgbClr val="DCE1E7"/>
+                      </a:solidFill>
+                      <a:prstDash val="solid"/>
+                      <a:round/>
+                      <a:headEnd type="none" w="med" len="med"/>
+                      <a:tailEnd type="none" w="med" len="med"/>
+                    </a:lnT>
+                    <a:lnB w="9525" cap="flat" cmpd="sng" algn="ctr">
+                      <a:solidFill>
+                        <a:srgbClr val="DCE1E7"/>
+                      </a:solidFill>
+                      <a:prstDash val="solid"/>
+                      <a:round/>
+                      <a:headEnd type="none" w="med" len="med"/>
+                      <a:tailEnd type="none" w="med" len="med"/>
+                    </a:lnB>
+                  </a:tcPr>
+                </a:tc>
+                <a:tc>
+                  <a:txBody>
+                    <a:bodyPr/>
+                    <a:lstStyle/>
+                    <a:p>
+                      <a:pPr algn="ctr" indent="0" marL="0">
+                        <a:buNone/>
+                      </a:pPr>
+                      <a:r>
+                        <a:rPr lang="en-US" sz="900" dirty="0">
+                          <a:solidFill>
+                            <a:srgbClr val="7B8794"/>
+                          </a:solidFill>
+                          <a:latin typeface="Arial" pitchFamily="34" charset="0"/>
+                          <a:ea typeface="Arial" pitchFamily="34" charset="-122"/>
+                          <a:cs typeface="Arial" pitchFamily="34" charset="-120"/>
+                        </a:rPr>
+                        <a:t>프로토타입</a:t>
+                      </a:r>
+                      <a:endParaRPr lang="en-US" sz="900" dirty="0">
+                        <a:latin typeface="Arial" charset="0"/>
+                        <a:ea typeface="Arial" charset="0"/>
+                        <a:cs typeface="Arial" charset="0"/>
+                      </a:endParaRPr>
+                    </a:p>
+                  </a:txBody>
+                  <a:tcPr marL="101600" marR="101600" marT="50800" marB="50800" anchor="ctr">
+                    <a:lnL w="9525" cap="flat" cmpd="sng" algn="ctr">
+                      <a:solidFill>
+                        <a:srgbClr val="DCE1E7"/>
+                      </a:solidFill>
+                      <a:prstDash val="solid"/>
+                      <a:round/>
+                      <a:headEnd type="none" w="med" len="med"/>
+                      <a:tailEnd type="none" w="med" len="med"/>
+                    </a:lnL>
+                    <a:lnR w="9525" cap="flat" cmpd="sng" algn="ctr">
+                      <a:solidFill>
+                        <a:srgbClr val="DCE1E7"/>
+                      </a:solidFill>
+                      <a:prstDash val="solid"/>
+                      <a:round/>
+                      <a:headEnd type="none" w="med" len="med"/>
+                      <a:tailEnd type="none" w="med" len="med"/>
+                    </a:lnR>
+                    <a:lnT w="9525" cap="flat" cmpd="sng" algn="ctr">
+                      <a:solidFill>
+                        <a:srgbClr val="DCE1E7"/>
+                      </a:solidFill>
+                      <a:prstDash val="solid"/>
+                      <a:round/>
+                      <a:headEnd type="none" w="med" len="med"/>
+                      <a:tailEnd type="none" w="med" len="med"/>
+                    </a:lnT>
+                    <a:lnB w="9525" cap="flat" cmpd="sng" algn="ctr">
+                      <a:solidFill>
+                        <a:srgbClr val="DCE1E7"/>
+                      </a:solidFill>
+                      <a:prstDash val="solid"/>
+                      <a:round/>
+                      <a:headEnd type="none" w="med" len="med"/>
+                      <a:tailEnd type="none" w="med" len="med"/>
+                    </a:lnB>
+                  </a:tcPr>
+                </a:tc>
+                <a:tc>
+                  <a:txBody>
+                    <a:bodyPr/>
+                    <a:lstStyle/>
+                    <a:p>
+                      <a:pPr algn="ctr" indent="0" marL="0">
+                        <a:buNone/>
+                      </a:pPr>
+                      <a:r>
+                        <a:rPr lang="en-US" sz="950" b="1" dirty="0">
+                          <a:solidFill>
+                            <a:srgbClr val="0B6E6E"/>
+                          </a:solidFill>
+                          <a:latin typeface="Arial" pitchFamily="34" charset="0"/>
+                          <a:ea typeface="Arial" pitchFamily="34" charset="-122"/>
+                          <a:cs typeface="Arial" pitchFamily="34" charset="-120"/>
+                        </a:rPr>
+                        <a:t>5.00</a:t>
+                      </a:r>
+                      <a:endParaRPr lang="en-US" sz="950" dirty="0">
+                        <a:latin typeface="Arial" charset="0"/>
+                        <a:ea typeface="Arial" charset="0"/>
+                        <a:cs typeface="Arial" charset="0"/>
+                      </a:endParaRPr>
+                    </a:p>
+                  </a:txBody>
+                  <a:tcPr marL="101600" marR="101600" marT="50800" marB="50800" anchor="ctr">
+                    <a:lnL w="9525" cap="flat" cmpd="sng" algn="ctr">
+                      <a:solidFill>
+                        <a:srgbClr val="DCE1E7"/>
+                      </a:solidFill>
+                      <a:prstDash val="solid"/>
+                      <a:round/>
+                      <a:headEnd type="none" w="med" len="med"/>
+                      <a:tailEnd type="none" w="med" len="med"/>
+                    </a:lnL>
+                    <a:lnR w="9525" cap="flat" cmpd="sng" algn="ctr">
+                      <a:solidFill>
+                        <a:srgbClr val="DCE1E7"/>
+                      </a:solidFill>
+                      <a:prstDash val="solid"/>
+                      <a:round/>
+                      <a:headEnd type="none" w="med" len="med"/>
+                      <a:tailEnd type="none" w="med" len="med"/>
+                    </a:lnR>
+                    <a:lnT w="9525" cap="flat" cmpd="sng" algn="ctr">
+                      <a:solidFill>
+                        <a:srgbClr val="DCE1E7"/>
+                      </a:solidFill>
+                      <a:prstDash val="solid"/>
+                      <a:round/>
+                      <a:headEnd type="none" w="med" len="med"/>
+                      <a:tailEnd type="none" w="med" len="med"/>
+                    </a:lnT>
+                    <a:lnB w="9525" cap="flat" cmpd="sng" algn="ctr">
+                      <a:solidFill>
+                        <a:srgbClr val="DCE1E7"/>
+                      </a:solidFill>
+                      <a:prstDash val="solid"/>
+                      <a:round/>
+                      <a:headEnd type="none" w="med" len="med"/>
+                      <a:tailEnd type="none" w="med" len="med"/>
+                    </a:lnB>
+                  </a:tcPr>
+                </a:tc>
+                <a:tc>
+                  <a:txBody>
+                    <a:bodyPr/>
+                    <a:lstStyle/>
+                    <a:p>
+                      <a:pPr algn="ctr" indent="0" marL="0">
+                        <a:buNone/>
+                      </a:pPr>
+                      <a:r>
+                        <a:rPr lang="en-US" sz="950" b="1" dirty="0">
+                          <a:solidFill>
+                            <a:srgbClr val="B0503F"/>
+                          </a:solidFill>
+                          <a:latin typeface="Arial" pitchFamily="34" charset="0"/>
+                          <a:ea typeface="Arial" pitchFamily="34" charset="-122"/>
+                          <a:cs typeface="Arial" pitchFamily="34" charset="-120"/>
+                        </a:rPr>
+                        <a:t>7.00 ~ 7.56</a:t>
+                      </a:r>
+                      <a:endParaRPr lang="en-US" sz="950" dirty="0">
+                        <a:latin typeface="Arial" charset="0"/>
+                        <a:ea typeface="Arial" charset="0"/>
+                        <a:cs typeface="Arial" charset="0"/>
+                      </a:endParaRPr>
+                    </a:p>
+                  </a:txBody>
+                  <a:tcPr marL="101600" marR="101600" marT="50800" marB="50800" anchor="ctr">
+                    <a:lnL w="9525" cap="flat" cmpd="sng" algn="ctr">
+                      <a:solidFill>
+                        <a:srgbClr val="DCE1E7"/>
+                      </a:solidFill>
+                      <a:prstDash val="solid"/>
+                      <a:round/>
+                      <a:headEnd type="none" w="med" len="med"/>
+                      <a:tailEnd type="none" w="med" len="med"/>
+                    </a:lnL>
+                    <a:lnR w="9525" cap="flat" cmpd="sng" algn="ctr">
+                      <a:solidFill>
+                        <a:srgbClr val="DCE1E7"/>
+                      </a:solidFill>
+                      <a:prstDash val="solid"/>
+                      <a:round/>
+                      <a:headEnd type="none" w="med" len="med"/>
+                      <a:tailEnd type="none" w="med" len="med"/>
+                    </a:lnR>
+                    <a:lnT w="9525" cap="flat" cmpd="sng" algn="ctr">
+                      <a:solidFill>
+                        <a:srgbClr val="DCE1E7"/>
+                      </a:solidFill>
+                      <a:prstDash val="solid"/>
+                      <a:round/>
+                      <a:headEnd type="none" w="med" len="med"/>
+                      <a:tailEnd type="none" w="med" len="med"/>
+                    </a:lnT>
+                    <a:lnB w="9525" cap="flat" cmpd="sng" algn="ctr">
+                      <a:solidFill>
+                        <a:srgbClr val="DCE1E7"/>
+                      </a:solidFill>
+                      <a:prstDash val="solid"/>
+                      <a:round/>
+                      <a:headEnd type="none" w="med" len="med"/>
+                      <a:tailEnd type="none" w="med" len="med"/>
+                    </a:lnB>
+                  </a:tcPr>
+                </a:tc>
+              </a:tr>
+              <a:tr h="329184">
+                <a:tc>
+                  <a:txBody>
+                    <a:bodyPr/>
+                    <a:lstStyle/>
+                    <a:p>
+                      <a:pPr indent="0" marL="0">
+                        <a:buNone/>
+                      </a:pPr>
+                      <a:r>
+                        <a:rPr lang="en-US" sz="950" b="1" dirty="0">
+                          <a:solidFill>
+                            <a:srgbClr val="1F2933"/>
+                          </a:solidFill>
+                          <a:latin typeface="Arial" pitchFamily="34" charset="0"/>
+                          <a:ea typeface="Arial" pitchFamily="34" charset="-122"/>
+                          <a:cs typeface="Arial" pitchFamily="34" charset="-120"/>
+                        </a:rPr>
+                        <a:t>[실측] 구분 지표 (이질 워크로드)</a:t>
+                      </a:r>
+                      <a:endParaRPr lang="en-US" sz="950" dirty="0">
+                        <a:latin typeface="Arial" charset="0"/>
+                        <a:ea typeface="Arial" charset="0"/>
+                        <a:cs typeface="Arial" charset="0"/>
+                      </a:endParaRPr>
+                    </a:p>
+                  </a:txBody>
+                  <a:tcPr marL="101600" marR="101600" marT="50800" marB="50800" anchor="ctr">
+                    <a:lnL w="9525" cap="flat" cmpd="sng" algn="ctr">
+                      <a:solidFill>
+                        <a:srgbClr val="DCE1E7"/>
+                      </a:solidFill>
+                      <a:prstDash val="solid"/>
+                      <a:round/>
+                      <a:headEnd type="none" w="med" len="med"/>
+                      <a:tailEnd type="none" w="med" len="med"/>
+                    </a:lnL>
+                    <a:lnR w="9525" cap="flat" cmpd="sng" algn="ctr">
+                      <a:solidFill>
+                        <a:srgbClr val="DCE1E7"/>
+                      </a:solidFill>
+                      <a:prstDash val="solid"/>
+                      <a:round/>
+                      <a:headEnd type="none" w="med" len="med"/>
+                      <a:tailEnd type="none" w="med" len="med"/>
+                    </a:lnR>
+                    <a:lnT w="9525" cap="flat" cmpd="sng" algn="ctr">
+                      <a:solidFill>
+                        <a:srgbClr val="DCE1E7"/>
+                      </a:solidFill>
+                      <a:prstDash val="solid"/>
+                      <a:round/>
+                      <a:headEnd type="none" w="med" len="med"/>
+                      <a:tailEnd type="none" w="med" len="med"/>
+                    </a:lnT>
+                    <a:lnB w="9525" cap="flat" cmpd="sng" algn="ctr">
+                      <a:solidFill>
+                        <a:srgbClr val="DCE1E7"/>
+                      </a:solidFill>
+                      <a:prstDash val="solid"/>
+                      <a:round/>
+                      <a:headEnd type="none" w="med" len="med"/>
+                      <a:tailEnd type="none" w="med" len="med"/>
+                    </a:lnB>
+                  </a:tcPr>
+                </a:tc>
+                <a:tc>
+                  <a:txBody>
+                    <a:bodyPr/>
+                    <a:lstStyle/>
+                    <a:p>
+                      <a:pPr algn="ctr" indent="0" marL="0">
+                        <a:buNone/>
+                      </a:pPr>
+                      <a:r>
+                        <a:rPr lang="en-US" sz="900" dirty="0">
+                          <a:solidFill>
+                            <a:srgbClr val="7B8794"/>
+                          </a:solidFill>
+                          <a:latin typeface="Arial" pitchFamily="34" charset="0"/>
+                          <a:ea typeface="Arial" pitchFamily="34" charset="-122"/>
+                          <a:cs typeface="Arial" pitchFamily="34" charset="-120"/>
+                        </a:rPr>
+                        <a:t>프로토타입</a:t>
+                      </a:r>
+                      <a:endParaRPr lang="en-US" sz="900" dirty="0">
+                        <a:latin typeface="Arial" charset="0"/>
+                        <a:ea typeface="Arial" charset="0"/>
+                        <a:cs typeface="Arial" charset="0"/>
+                      </a:endParaRPr>
+                    </a:p>
+                  </a:txBody>
+                  <a:tcPr marL="101600" marR="101600" marT="50800" marB="50800" anchor="ctr">
+                    <a:lnL w="9525" cap="flat" cmpd="sng" algn="ctr">
+                      <a:solidFill>
+                        <a:srgbClr val="DCE1E7"/>
+                      </a:solidFill>
+                      <a:prstDash val="solid"/>
+                      <a:round/>
+                      <a:headEnd type="none" w="med" len="med"/>
+                      <a:tailEnd type="none" w="med" len="med"/>
+                    </a:lnL>
+                    <a:lnR w="9525" cap="flat" cmpd="sng" algn="ctr">
+                      <a:solidFill>
+                        <a:srgbClr val="DCE1E7"/>
+                      </a:solidFill>
+                      <a:prstDash val="solid"/>
+                      <a:round/>
+                      <a:headEnd type="none" w="med" len="med"/>
+                      <a:tailEnd type="none" w="med" len="med"/>
+                    </a:lnR>
+                    <a:lnT w="9525" cap="flat" cmpd="sng" algn="ctr">
+                      <a:solidFill>
+                        <a:srgbClr val="DCE1E7"/>
+                      </a:solidFill>
+                      <a:prstDash val="solid"/>
+                      <a:round/>
+                      <a:headEnd type="none" w="med" len="med"/>
+                      <a:tailEnd type="none" w="med" len="med"/>
+                    </a:lnT>
+                    <a:lnB w="9525" cap="flat" cmpd="sng" algn="ctr">
+                      <a:solidFill>
+                        <a:srgbClr val="DCE1E7"/>
+                      </a:solidFill>
+                      <a:prstDash val="solid"/>
+                      <a:round/>
+                      <a:headEnd type="none" w="med" len="med"/>
+                      <a:tailEnd type="none" w="med" len="med"/>
+                    </a:lnB>
+                  </a:tcPr>
+                </a:tc>
+                <a:tc>
+                  <a:txBody>
+                    <a:bodyPr/>
+                    <a:lstStyle/>
+                    <a:p>
+                      <a:pPr algn="ctr" indent="0" marL="0">
+                        <a:buNone/>
+                      </a:pPr>
+                      <a:r>
+                        <a:rPr lang="en-US" sz="950" b="1" dirty="0">
+                          <a:solidFill>
+                            <a:srgbClr val="0B6E6E"/>
+                          </a:solidFill>
+                          <a:latin typeface="Arial" pitchFamily="34" charset="0"/>
+                          <a:ea typeface="Arial" pitchFamily="34" charset="-122"/>
+                          <a:cs typeface="Arial" pitchFamily="34" charset="-120"/>
+                        </a:rPr>
+                        <a:t>2.06</a:t>
+                      </a:r>
+                      <a:endParaRPr lang="en-US" sz="950" dirty="0">
+                        <a:latin typeface="Arial" charset="0"/>
+                        <a:ea typeface="Arial" charset="0"/>
+                        <a:cs typeface="Arial" charset="0"/>
+                      </a:endParaRPr>
+                    </a:p>
+                  </a:txBody>
+                  <a:tcPr marL="101600" marR="101600" marT="50800" marB="50800" anchor="ctr">
+                    <a:lnL w="9525" cap="flat" cmpd="sng" algn="ctr">
+                      <a:solidFill>
+                        <a:srgbClr val="DCE1E7"/>
+                      </a:solidFill>
+                      <a:prstDash val="solid"/>
+                      <a:round/>
+                      <a:headEnd type="none" w="med" len="med"/>
+                      <a:tailEnd type="none" w="med" len="med"/>
+                    </a:lnL>
+                    <a:lnR w="9525" cap="flat" cmpd="sng" algn="ctr">
+                      <a:solidFill>
+                        <a:srgbClr val="DCE1E7"/>
+                      </a:solidFill>
+                      <a:prstDash val="solid"/>
+                      <a:round/>
+                      <a:headEnd type="none" w="med" len="med"/>
+                      <a:tailEnd type="none" w="med" len="med"/>
+                    </a:lnR>
+                    <a:lnT w="9525" cap="flat" cmpd="sng" algn="ctr">
+                      <a:solidFill>
+                        <a:srgbClr val="DCE1E7"/>
+                      </a:solidFill>
+                      <a:prstDash val="solid"/>
+                      <a:round/>
+                      <a:headEnd type="none" w="med" len="med"/>
+                      <a:tailEnd type="none" w="med" len="med"/>
+                    </a:lnT>
+                    <a:lnB w="9525" cap="flat" cmpd="sng" algn="ctr">
+                      <a:solidFill>
+                        <a:srgbClr val="DCE1E7"/>
+                      </a:solidFill>
+                      <a:prstDash val="solid"/>
+                      <a:round/>
+                      <a:headEnd type="none" w="med" len="med"/>
+                      <a:tailEnd type="none" w="med" len="med"/>
+                    </a:lnB>
+                  </a:tcPr>
+                </a:tc>
+                <a:tc>
+                  <a:txBody>
+                    <a:bodyPr/>
+                    <a:lstStyle/>
+                    <a:p>
+                      <a:pPr algn="ctr" indent="0" marL="0">
+                        <a:buNone/>
+                      </a:pPr>
+                      <a:r>
+                        <a:rPr lang="en-US" sz="950" b="1" dirty="0">
+                          <a:solidFill>
+                            <a:srgbClr val="B0503F"/>
+                          </a:solidFill>
+                          <a:latin typeface="Arial" pitchFamily="34" charset="0"/>
+                          <a:ea typeface="Arial" pitchFamily="34" charset="-122"/>
+                          <a:cs typeface="Arial" pitchFamily="34" charset="-120"/>
+                        </a:rPr>
+                        <a:t>2.11 유보X / 8.40 유보O</a:t>
+                      </a:r>
+                      <a:endParaRPr lang="en-US" sz="950" dirty="0">
+                        <a:latin typeface="Arial" charset="0"/>
+                        <a:ea typeface="Arial" charset="0"/>
+                        <a:cs typeface="Arial" charset="0"/>
+                      </a:endParaRPr>
+                    </a:p>
+                  </a:txBody>
+                  <a:tcPr marL="101600" marR="101600" marT="50800" marB="50800" anchor="ctr">
+                    <a:lnL w="9525" cap="flat" cmpd="sng" algn="ctr">
+                      <a:solidFill>
+                        <a:srgbClr val="DCE1E7"/>
+                      </a:solidFill>
+                      <a:prstDash val="solid"/>
+                      <a:round/>
+                      <a:headEnd type="none" w="med" len="med"/>
+                      <a:tailEnd type="none" w="med" len="med"/>
+                    </a:lnL>
+                    <a:lnR w="9525" cap="flat" cmpd="sng" algn="ctr">
+                      <a:solidFill>
+                        <a:srgbClr val="DCE1E7"/>
+                      </a:solidFill>
+                      <a:prstDash val="solid"/>
+                      <a:round/>
+                      <a:headEnd type="none" w="med" len="med"/>
+                      <a:tailEnd type="none" w="med" len="med"/>
+                    </a:lnR>
+                    <a:lnT w="9525" cap="flat" cmpd="sng" algn="ctr">
+                      <a:solidFill>
+                        <a:srgbClr val="DCE1E7"/>
+                      </a:solidFill>
+                      <a:prstDash val="solid"/>
+                      <a:round/>
+                      <a:headEnd type="none" w="med" len="med"/>
+                      <a:tailEnd type="none" w="med" len="med"/>
+                    </a:lnT>
+                    <a:lnB w="9525" cap="flat" cmpd="sng" algn="ctr">
+                      <a:solidFill>
+                        <a:srgbClr val="DCE1E7"/>
+                      </a:solidFill>
+                      <a:prstDash val="solid"/>
+                      <a:round/>
+                      <a:headEnd type="none" w="med" len="med"/>
+                      <a:tailEnd type="none" w="med" len="med"/>
+                    </a:lnB>
+                  </a:tcPr>
+                </a:tc>
+              </a:tr>
+              <a:tr h="329184">
+                <a:tc>
+                  <a:txBody>
+                    <a:bodyPr/>
+                    <a:lstStyle/>
+                    <a:p>
+                      <a:pPr indent="0" marL="0">
+                        <a:buNone/>
+                      </a:pPr>
+                      <a:r>
+                        <a:rPr lang="en-US" sz="950" b="1" dirty="0">
+                          <a:solidFill>
+                            <a:srgbClr val="1F2933"/>
+                          </a:solidFill>
+                          <a:latin typeface="Arial" pitchFamily="34" charset="0"/>
+                          <a:ea typeface="Arial" pitchFamily="34" charset="-122"/>
+                          <a:cs typeface="Arial" pitchFamily="34" charset="-120"/>
+                        </a:rPr>
+                        <a:t>[실측] 예약 없을 때 용량 초과 커밋</a:t>
+                      </a:r>
+                      <a:endParaRPr lang="en-US" sz="950" dirty="0">
+                        <a:latin typeface="Arial" charset="0"/>
+                        <a:ea typeface="Arial" charset="0"/>
+                        <a:cs typeface="Arial" charset="0"/>
+                      </a:endParaRPr>
+                    </a:p>
+                  </a:txBody>
+                  <a:tcPr marL="101600" marR="101600" marT="50800" marB="50800" anchor="ctr">
+                    <a:lnL w="9525" cap="flat" cmpd="sng" algn="ctr">
+                      <a:solidFill>
+                        <a:srgbClr val="DCE1E7"/>
+                      </a:solidFill>
+                      <a:prstDash val="solid"/>
+                      <a:round/>
+                      <a:headEnd type="none" w="med" len="med"/>
+                      <a:tailEnd type="none" w="med" len="med"/>
+                    </a:lnL>
+                    <a:lnR w="9525" cap="flat" cmpd="sng" algn="ctr">
+                      <a:solidFill>
+                        <a:srgbClr val="DCE1E7"/>
+                      </a:solidFill>
+                      <a:prstDash val="solid"/>
+                      <a:round/>
+                      <a:headEnd type="none" w="med" len="med"/>
+                      <a:tailEnd type="none" w="med" len="med"/>
+                    </a:lnR>
+                    <a:lnT w="9525" cap="flat" cmpd="sng" algn="ctr">
+                      <a:solidFill>
+                        <a:srgbClr val="DCE1E7"/>
+                      </a:solidFill>
+                      <a:prstDash val="solid"/>
+                      <a:round/>
+                      <a:headEnd type="none" w="med" len="med"/>
+                      <a:tailEnd type="none" w="med" len="med"/>
+                    </a:lnT>
+                    <a:lnB w="9525" cap="flat" cmpd="sng" algn="ctr">
+                      <a:solidFill>
+                        <a:srgbClr val="DCE1E7"/>
+                      </a:solidFill>
+                      <a:prstDash val="solid"/>
+                      <a:round/>
+                      <a:headEnd type="none" w="med" len="med"/>
+                      <a:tailEnd type="none" w="med" len="med"/>
+                    </a:lnB>
+                  </a:tcPr>
+                </a:tc>
+                <a:tc>
+                  <a:txBody>
+                    <a:bodyPr/>
+                    <a:lstStyle/>
+                    <a:p>
+                      <a:pPr algn="ctr" indent="0" marL="0">
+                        <a:buNone/>
+                      </a:pPr>
+                      <a:r>
+                        <a:rPr lang="en-US" sz="900" dirty="0">
+                          <a:solidFill>
+                            <a:srgbClr val="7B8794"/>
+                          </a:solidFill>
+                          <a:latin typeface="Arial" pitchFamily="34" charset="0"/>
+                          <a:ea typeface="Arial" pitchFamily="34" charset="-122"/>
+                          <a:cs typeface="Arial" pitchFamily="34" charset="-120"/>
+                        </a:rPr>
+                        <a:t>프로토타입</a:t>
+                      </a:r>
+                      <a:endParaRPr lang="en-US" sz="900" dirty="0">
+                        <a:latin typeface="Arial" charset="0"/>
+                        <a:ea typeface="Arial" charset="0"/>
+                        <a:cs typeface="Arial" charset="0"/>
+                      </a:endParaRPr>
+                    </a:p>
+                  </a:txBody>
+                  <a:tcPr marL="101600" marR="101600" marT="50800" marB="50800" anchor="ctr">
+                    <a:lnL w="9525" cap="flat" cmpd="sng" algn="ctr">
+                      <a:solidFill>
+                        <a:srgbClr val="DCE1E7"/>
+                      </a:solidFill>
+                      <a:prstDash val="solid"/>
+                      <a:round/>
+                      <a:headEnd type="none" w="med" len="med"/>
+                      <a:tailEnd type="none" w="med" len="med"/>
+                    </a:lnL>
+                    <a:lnR w="9525" cap="flat" cmpd="sng" algn="ctr">
+                      <a:solidFill>
+                        <a:srgbClr val="DCE1E7"/>
+                      </a:solidFill>
+                      <a:prstDash val="solid"/>
+                      <a:round/>
+                      <a:headEnd type="none" w="med" len="med"/>
+                      <a:tailEnd type="none" w="med" len="med"/>
+                    </a:lnR>
+                    <a:lnT w="9525" cap="flat" cmpd="sng" algn="ctr">
+                      <a:solidFill>
+                        <a:srgbClr val="DCE1E7"/>
+                      </a:solidFill>
+                      <a:prstDash val="solid"/>
+                      <a:round/>
+                      <a:headEnd type="none" w="med" len="med"/>
+                      <a:tailEnd type="none" w="med" len="med"/>
+                    </a:lnT>
+                    <a:lnB w="9525" cap="flat" cmpd="sng" algn="ctr">
+                      <a:solidFill>
+                        <a:srgbClr val="DCE1E7"/>
+                      </a:solidFill>
+                      <a:prstDash val="solid"/>
+                      <a:round/>
+                      <a:headEnd type="none" w="med" len="med"/>
+                      <a:tailEnd type="none" w="med" len="med"/>
+                    </a:lnB>
+                  </a:tcPr>
+                </a:tc>
+                <a:tc>
+                  <a:txBody>
+                    <a:bodyPr/>
+                    <a:lstStyle/>
+                    <a:p>
+                      <a:pPr algn="ctr" indent="0" marL="0">
+                        <a:buNone/>
+                      </a:pPr>
+                      <a:r>
+                        <a:rPr lang="en-US" sz="950" b="1" dirty="0">
+                          <a:solidFill>
+                            <a:srgbClr val="0B6E6E"/>
+                          </a:solidFill>
+                          <a:latin typeface="Arial" pitchFamily="34" charset="0"/>
+                          <a:ea typeface="Arial" pitchFamily="34" charset="-122"/>
+                          <a:cs typeface="Arial" pitchFamily="34" charset="-120"/>
+                        </a:rPr>
+                        <a:t>72회</a:t>
+                      </a:r>
+                      <a:endParaRPr lang="en-US" sz="950" dirty="0">
+                        <a:latin typeface="Arial" charset="0"/>
+                        <a:ea typeface="Arial" charset="0"/>
+                        <a:cs typeface="Arial" charset="0"/>
+                      </a:endParaRPr>
+                    </a:p>
+                  </a:txBody>
+                  <a:tcPr marL="101600" marR="101600" marT="50800" marB="50800" anchor="ctr">
+                    <a:lnL w="9525" cap="flat" cmpd="sng" algn="ctr">
+                      <a:solidFill>
+                        <a:srgbClr val="DCE1E7"/>
+                      </a:solidFill>
+                      <a:prstDash val="solid"/>
+                      <a:round/>
+                      <a:headEnd type="none" w="med" len="med"/>
+                      <a:tailEnd type="none" w="med" len="med"/>
+                    </a:lnL>
+                    <a:lnR w="9525" cap="flat" cmpd="sng" algn="ctr">
+                      <a:solidFill>
+                        <a:srgbClr val="DCE1E7"/>
+                      </a:solidFill>
+                      <a:prstDash val="solid"/>
+                      <a:round/>
+                      <a:headEnd type="none" w="med" len="med"/>
+                      <a:tailEnd type="none" w="med" len="med"/>
+                    </a:lnR>
+                    <a:lnT w="9525" cap="flat" cmpd="sng" algn="ctr">
+                      <a:solidFill>
+                        <a:srgbClr val="DCE1E7"/>
+                      </a:solidFill>
+                      <a:prstDash val="solid"/>
+                      <a:round/>
+                      <a:headEnd type="none" w="med" len="med"/>
+                      <a:tailEnd type="none" w="med" len="med"/>
+                    </a:lnT>
+                    <a:lnB w="9525" cap="flat" cmpd="sng" algn="ctr">
+                      <a:solidFill>
+                        <a:srgbClr val="DCE1E7"/>
+                      </a:solidFill>
+                      <a:prstDash val="solid"/>
+                      <a:round/>
+                      <a:headEnd type="none" w="med" len="med"/>
+                      <a:tailEnd type="none" w="med" len="med"/>
+                    </a:lnB>
+                  </a:tcPr>
+                </a:tc>
+                <a:tc>
+                  <a:txBody>
+                    <a:bodyPr/>
+                    <a:lstStyle/>
+                    <a:p>
+                      <a:pPr algn="ctr" indent="0" marL="0">
+                        <a:buNone/>
+                      </a:pPr>
+                      <a:r>
+                        <a:rPr lang="en-US" sz="950" b="1" dirty="0">
+                          <a:solidFill>
+                            <a:srgbClr val="B0503F"/>
+                          </a:solidFill>
+                          <a:latin typeface="Arial" pitchFamily="34" charset="0"/>
+                          <a:ea typeface="Arial" pitchFamily="34" charset="-122"/>
+                          <a:cs typeface="Arial" pitchFamily="34" charset="-120"/>
+                        </a:rPr>
+                        <a:t>해당 없음 (유보 A 필요는 동일)</a:t>
+                      </a:r>
+                      <a:endParaRPr lang="en-US" sz="950" dirty="0">
+                        <a:latin typeface="Arial" charset="0"/>
+                        <a:ea typeface="Arial" charset="0"/>
+                        <a:cs typeface="Arial" charset="0"/>
+                      </a:endParaRPr>
+                    </a:p>
+                  </a:txBody>
+                  <a:tcPr marL="101600" marR="101600" marT="50800" marB="50800" anchor="ctr">
+                    <a:lnL w="9525" cap="flat" cmpd="sng" algn="ctr">
+                      <a:solidFill>
+                        <a:srgbClr val="DCE1E7"/>
+                      </a:solidFill>
+                      <a:prstDash val="solid"/>
+                      <a:round/>
+                      <a:headEnd type="none" w="med" len="med"/>
+                      <a:tailEnd type="none" w="med" len="med"/>
+                    </a:lnL>
+                    <a:lnR w="9525" cap="flat" cmpd="sng" algn="ctr">
+                      <a:solidFill>
+                        <a:srgbClr val="DCE1E7"/>
+                      </a:solidFill>
+                      <a:prstDash val="solid"/>
+                      <a:round/>
+                      <a:headEnd type="none" w="med" len="med"/>
+                      <a:tailEnd type="none" w="med" len="med"/>
+                    </a:lnR>
+                    <a:lnT w="9525" cap="flat" cmpd="sng" algn="ctr">
+                      <a:solidFill>
+                        <a:srgbClr val="DCE1E7"/>
+                      </a:solidFill>
+                      <a:prstDash val="solid"/>
+                      <a:round/>
+                      <a:headEnd type="none" w="med" len="med"/>
+                      <a:tailEnd type="none" w="med" len="med"/>
+                    </a:lnT>
+                    <a:lnB w="9525" cap="flat" cmpd="sng" algn="ctr">
+                      <a:solidFill>
+                        <a:srgbClr val="DCE1E7"/>
+                      </a:solidFill>
+                      <a:prstDash val="solid"/>
+                      <a:round/>
+                      <a:headEnd type="none" w="med" len="med"/>
+                      <a:tailEnd type="none" w="med" len="med"/>
+                    </a:lnB>
+                  </a:tcPr>
+                </a:tc>
+              </a:tr>
+              <a:tr h="329184">
                 <a:tc>
                   <a:txBody>
                     <a:bodyPr/>
@@ -3236,7 +4022,7 @@
                   </a:tcPr>
                 </a:tc>
               </a:tr>
-              <a:tr h="402336">
+              <a:tr h="329184">
                 <a:tc>
                   <a:txBody>
                     <a:bodyPr/>
@@ -3498,7 +4284,7 @@
                   </a:tcPr>
                 </a:tc>
               </a:tr>
-              <a:tr h="402336">
+              <a:tr h="329184">
                 <a:tc>
                   <a:txBody>
                     <a:bodyPr/>
@@ -3760,7 +4546,7 @@
                   </a:tcPr>
                 </a:tc>
               </a:tr>
-              <a:tr h="402336">
+              <a:tr h="329184">
                 <a:tc>
                   <a:txBody>
                     <a:bodyPr/>
@@ -4022,7 +4808,7 @@
                   </a:tcPr>
                 </a:tc>
               </a:tr>
-              <a:tr h="402336">
+              <a:tr h="329184">
                 <a:tc>
                   <a:txBody>
                     <a:bodyPr/>
@@ -4284,7 +5070,7 @@
                   </a:tcPr>
                 </a:tc>
               </a:tr>
-              <a:tr h="402336">
+              <a:tr h="329184">
                 <a:tc>
                   <a:txBody>
                     <a:bodyPr/>
@@ -4546,7 +5332,7 @@
                   </a:tcPr>
                 </a:tc>
               </a:tr>
-              <a:tr h="402336">
+              <a:tr h="329184">
                 <a:tc>
                   <a:txBody>
                     <a:bodyPr/>
@@ -4808,7 +5594,7 @@
                   </a:tcPr>
                 </a:tc>
               </a:tr>
-              <a:tr h="402336">
+              <a:tr h="329184">
                 <a:tc>
                   <a:txBody>
                     <a:bodyPr/>
@@ -5070,7 +5856,7 @@
                   </a:tcPr>
                 </a:tc>
               </a:tr>
-              <a:tr h="402336">
+              <a:tr h="329184">
                 <a:tc>
                   <a:txBody>
                     <a:bodyPr/>
@@ -5344,8 +6130,8 @@
         </p:nvSpPr>
         <p:spPr>
           <a:xfrm>
-            <a:off x="457200" y="5870448"/>
-            <a:ext cx="11247120" cy="310896"/>
+            <a:off x="457200" y="5907024"/>
+            <a:ext cx="11247120" cy="274320"/>
           </a:xfrm>
           <a:prstGeom prst="rect">
             <a:avLst/>
@@ -5369,7 +6155,7 @@
                 <a:ea typeface="Arial" pitchFamily="34" charset="-122"/>
                 <a:cs typeface="Arial" pitchFamily="34" charset="-120"/>
               </a:rPr>
-              <a:t>별점을 매길 때 근거가 다이어그램에서 나오지 않는다면, 별점이 아니라 다이어그램이 부족한 것이다.</a:t>
+              <a:t>[실측] 표시는 doc-mk/prototype 실행 결과다. 나머지는 다이어그램에서 센 값이다.</a:t>
             </a:r>
             <a:endParaRPr lang="en-US" sz="1000" dirty="0"/>
           </a:p>
@@ -19278,11 +20064,11 @@
         <p:spPr>
           <a:xfrm>
             <a:off x="9235440" y="2670048"/>
-            <a:ext cx="2286000" cy="768096"/>
+            <a:ext cx="2377440" cy="1133856"/>
           </a:xfrm>
           <a:prstGeom prst="roundRect">
             <a:avLst>
-              <a:gd name="adj" fmla="val 4762"/>
+              <a:gd name="adj" fmla="val 3226"/>
             </a:avLst>
           </a:prstGeom>
           <a:solidFill>
@@ -19305,7 +20091,7 @@
         <p:spPr>
           <a:xfrm>
             <a:off x="9235440" y="2670048"/>
-            <a:ext cx="2286000" cy="274320"/>
+            <a:ext cx="2377440" cy="274320"/>
           </a:xfrm>
           <a:prstGeom prst="rect">
             <a:avLst/>
@@ -19330,7 +20116,7 @@
         <p:spPr>
           <a:xfrm>
             <a:off x="9235440" y="2670048"/>
-            <a:ext cx="2286000" cy="274320"/>
+            <a:ext cx="2377440" cy="274320"/>
           </a:xfrm>
           <a:prstGeom prst="rect">
             <a:avLst/>
@@ -19354,7 +20140,7 @@
                 <a:ea typeface="Arial" pitchFamily="34" charset="-122"/>
                 <a:cs typeface="Arial" pitchFamily="34" charset="-120"/>
               </a:rPr>
-              <a:t>ClassTierContract</a:t>
+              <a:t>CostModel  (정책)</a:t>
             </a:r>
             <a:endParaRPr lang="en-US" sz="900" dirty="0"/>
           </a:p>
@@ -19369,7 +20155,7 @@
         <p:spPr>
           <a:xfrm>
             <a:off x="9326880" y="2990088"/>
-            <a:ext cx="2103120" cy="420624"/>
+            <a:ext cx="2194560" cy="786384"/>
           </a:xfrm>
           <a:prstGeom prst="rect">
             <a:avLst/>
@@ -19396,7 +20182,7 @@
                 <a:ea typeface="Arial" pitchFamily="34" charset="-122"/>
                 <a:cs typeface="Arial" pitchFamily="34" charset="-120"/>
               </a:rPr>
-              <a:t>+ target_tier(class)</a:t>
+              <a:t>+ cost(obs, tier, util, blocks)</a:t>
             </a:r>
             <a:endParaRPr lang="en-US" sz="800" dirty="0"/>
           </a:p>
@@ -19416,7 +20202,47 @@
                 <a:ea typeface="Arial" pitchFamily="34" charset="-122"/>
                 <a:cs typeface="Arial" pitchFamily="34" charset="-120"/>
               </a:rPr>
-              <a:t>+ fallback_order</a:t>
+              <a:t>  = -(강도 × 대역폭)</a:t>
+            </a:r>
+            <a:endParaRPr lang="en-US" sz="800" dirty="0"/>
+          </a:p>
+          <a:p>
+            <a:pPr indent="0" marL="0">
+              <a:lnSpc>
+                <a:spcPct val="100000"/>
+              </a:lnSpc>
+              <a:buNone/>
+            </a:pPr>
+            <a:r>
+              <a:rPr lang="en-US" sz="800" dirty="0">
+                <a:solidFill>
+                  <a:srgbClr val="3E4C59"/>
+                </a:solidFill>
+                <a:latin typeface="Arial" pitchFamily="34" charset="0"/>
+                <a:ea typeface="Arial" pitchFamily="34" charset="-122"/>
+                <a:cs typeface="Arial" pitchFamily="34" charset="-120"/>
+              </a:rPr>
+              <a:t>    + 자리값 + 이동비용</a:t>
+            </a:r>
+            <a:endParaRPr lang="en-US" sz="800" dirty="0"/>
+          </a:p>
+          <a:p>
+            <a:pPr indent="0" marL="0">
+              <a:lnSpc>
+                <a:spcPct val="100000"/>
+              </a:lnSpc>
+              <a:buNone/>
+            </a:pPr>
+            <a:r>
+              <a:rPr lang="en-US" sz="800" dirty="0">
+                <a:solidFill>
+                  <a:srgbClr val="3E4C59"/>
+                </a:solidFill>
+                <a:latin typeface="Arial" pitchFamily="34" charset="0"/>
+                <a:ea typeface="Arial" pitchFamily="34" charset="-122"/>
+                <a:cs typeface="Arial" pitchFamily="34" charset="-120"/>
+              </a:rPr>
+              <a:t>+ reserve_for_future</a:t>
             </a:r>
             <a:endParaRPr lang="en-US" sz="800" dirty="0"/>
           </a:p>
@@ -19455,7 +20281,7 @@
         <p:spPr>
           <a:xfrm>
             <a:off x="9715500" y="2487168"/>
-            <a:ext cx="662940" cy="182880"/>
+            <a:ext cx="708660" cy="182880"/>
           </a:xfrm>
           <a:prstGeom prst="line">
             <a:avLst/>
@@ -19527,7 +20353,7 @@
                 <a:ea typeface="Arial" pitchFamily="34" charset="-122"/>
                 <a:cs typeface="Arial" pitchFamily="34" charset="-120"/>
               </a:rPr>
-              <a:t>신규 tier 추가 = 8개 클래스 × 새 tier 계약 재정의</a:t>
+              <a:t>크기는 가치와 가격에 똑같이 비례해 상쇄된다 — 남는 것은 블록당 읽기 강도</a:t>
             </a:r>
             <a:endParaRPr lang="en-US" sz="850" dirty="0"/>
           </a:p>
@@ -19706,7 +20532,7 @@
                 <a:ea typeface="Arial" pitchFamily="34" charset="-122"/>
                 <a:cs typeface="Arial" pitchFamily="34" charset="-120"/>
               </a:rPr>
-              <a:t>클래스 4개. ObjectFeature의 세 필드는 모두 할당 시점에 관측 불가능하다</a:t>
+              <a:t>정책은 CostModel 하나에 응축된다 — 비용은 블록 1개 단위로 계산한다</a:t>
             </a:r>
             <a:endParaRPr lang="en-US" sz="950" dirty="0"/>
           </a:p>
@@ -19730,7 +20556,7 @@
                 <a:ea typeface="Arial" pitchFamily="34" charset="-122"/>
                 <a:cs typeface="Arial" pitchFamily="34" charset="-120"/>
               </a:rPr>
-              <a:t>값을 채우려면 힌트 API · 휴리스틱 · 과거 통계 중 하나가 필요하다</a:t>
+              <a:t>큰 객체는 블록을 많이 쓰는 만큼 값도 이득도 커지므로 크기가 상쇄된다. 남는 것은 블록당 읽기 강도뿐이고, 그 주성분인 수명은 관측 불가능하다</a:t>
             </a:r>
             <a:endParaRPr lang="en-US" sz="950" dirty="0"/>
           </a:p>
@@ -19754,7 +20580,7 @@
                 <a:ea typeface="Arial" pitchFamily="34" charset="-122"/>
                 <a:cs typeface="Arial" pitchFamily="34" charset="-120"/>
               </a:rPr>
-              <a:t>결정 근거가 ObjectClass 값으로 남아 로깅과 재현이 자연스럽다</a:t>
+              <a:t>reserve_for_future는 아직 오지 않은 고강도 요청을 위해 상위 tier를 비워 두는 손잡이다 — 적정값이 미래 분포에 달려 있다</a:t>
             </a:r>
             <a:endParaRPr lang="en-US" sz="950" dirty="0"/>
           </a:p>
@@ -19793,7 +20619,7 @@
                 <a:ea typeface="Arial" pitchFamily="34" charset="-122"/>
                 <a:cs typeface="Arial" pitchFamily="34" charset="-120"/>
               </a:rPr>
-              <a:t>→ QA2 · QA4 근거</a:t>
+              <a:t>→ QA1 · QA2 · QA4 근거</a:t>
             </a:r>
             <a:endParaRPr lang="en-US" sz="950" dirty="0"/>
           </a:p>
@@ -21228,7 +22054,7 @@
                 <a:ea typeface="Arial" pitchFamily="34" charset="-122"/>
                 <a:cs typeface="Arial" pitchFamily="34" charset="-120"/>
               </a:rPr>
-              <a:t>ClassTierContract가 정책이 사는 자리다. target_tier와 fallback_order를 함께 갖는다.</a:t>
+              <a:t>CostModel이 정책이 사는 자리다. 비용을 블록 1개 단위로 계산하므로 크기는 가치와 가격에서 상쇄된다 — 크기를 무시하는 것이 아니라 상쇄되는 것이 옳다.</a:t>
             </a:r>
             <a:endParaRPr lang="en-US" sz="950" dirty="0"/>
           </a:p>
@@ -21334,7 +22160,7 @@
                 <a:ea typeface="Arial" pitchFamily="34" charset="-122"/>
                 <a:cs typeface="Arial" pitchFamily="34" charset="-120"/>
               </a:rPr>
-              <a:t>새 tier를 넣으면 8개 클래스 전부에 대해 계약을 다시 써야 한다 — 행 추가로 끝나지 않는다.</a:t>
+              <a:t>그래서 배치를 가르는 것은 블록당 읽기 강도뿐이고, 그 주성분인 수명은 관측할 수 없다. 구분 능력이 미래 정보에 묶여 있다는 사실이 비용 함수의 형태에서 나온다.</a:t>
             </a:r>
             <a:endParaRPr lang="en-US" sz="950" dirty="0"/>
           </a:p>
@@ -21612,7 +22438,7 @@
                 <a:ea typeface="Arial" pitchFamily="34" charset="-122"/>
                 <a:cs typeface="Arial" pitchFamily="34" charset="-120"/>
               </a:rPr>
-              <a:t>3개 (전부 관측 불가)</a:t>
+              <a:t>3개 (강도의 주성분은 관측 불가)</a:t>
             </a:r>
             <a:endParaRPr lang="en-US" sz="1300" dirty="0"/>
           </a:p>
@@ -21745,7 +22571,7 @@
                 <a:ea typeface="Arial" pitchFamily="34" charset="-122"/>
                 <a:cs typeface="Arial" pitchFamily="34" charset="-120"/>
               </a:rPr>
-              <a:t>계약 8개 재정의</a:t>
+              <a:t>비용 함수는 그대로, 유보량 재튜닝</a:t>
             </a:r>
             <a:endParaRPr lang="en-US" sz="1300" dirty="0"/>
           </a:p>
